--- a/output/presentation/T08-evidence.pptx
+++ b/output/presentation/T08-evidence.pptx
@@ -19,9 +19,10 @@
     <p:sldId id="267" r:id="rId13"/>
     <p:sldId id="268" r:id="rId14"/>
     <p:sldId id="269" r:id="rId15"/>
+    <p:sldId id="270" r:id="rId16"/>
   </p:sldIdLst>
   <p:notesMasterIdLst>
-    <p:notesMasterId r:id="rId16"/>
+    <p:notesMasterId r:id="rId17"/>
   </p:notesMasterIdLst>
   <p:sldSz cx="12192000" cy="6858000"/>
   <p:notesSz cx="6858000" cy="12192000"/>
@@ -955,7 +956,7 @@
           <a:p>
             <a:r>
               <a:rPr lang="en-US" dirty="0"/>
-              <a:t>첫 요청은 콜드스타트로 몇 초 걸릴 수 있다. 제출 직전에 한 번 열어 두면 대기 화면 없이 열린다.</a:t>
+              <a:t/>
             </a:r>
             <a:endParaRPr lang="en-US" dirty="0"/>
           </a:p>
@@ -979,6 +980,94 @@
             <a:fld id="{F7021451-1387-4CA6-816F-3879F97B5CBC}" type="slidenum">
               <a:rPr lang="en-US"/>
               <a:t>14</a:t>
+            </a:fld>
+            <a:endParaRPr lang="en-US"/>
+          </a:p>
+        </p:txBody>
+      </p:sp>
+    </p:spTree>
+    <p:extLst>
+      <p:ext uri="{BB962C8B-B14F-4D97-AF65-F5344CB8AC3E}">
+        <p14:creationId xmlns:p14="http://schemas.microsoft.com/office/powerpoint/2010/main" val="1024086991"/>
+      </p:ext>
+    </p:extLst>
+  </p:cSld>
+  <p:clrMapOvr>
+    <a:masterClrMapping/>
+  </p:clrMapOvr>
+</p:notes>
+</file>
+
+<file path=ppt/notesSlides/notesSlide15.xml><?xml version="1.0" encoding="utf-8"?>
+<p:notes xmlns:a="http://schemas.openxmlformats.org/drawingml/2006/main" xmlns:r="http://schemas.openxmlformats.org/officeDocument/2006/relationships" xmlns:p="http://schemas.openxmlformats.org/presentationml/2006/main">
+  <p:cSld>
+    <p:spTree>
+      <p:nvGrpSpPr>
+        <p:cNvPr id="1" name=""/>
+        <p:cNvGrpSpPr/>
+        <p:nvPr/>
+      </p:nvGrpSpPr>
+      <p:grpSpPr>
+        <a:xfrm>
+          <a:off x="0" y="0"/>
+          <a:ext cx="0" cy="0"/>
+          <a:chOff x="0" y="0"/>
+          <a:chExt cx="0" cy="0"/>
+        </a:xfrm>
+      </p:grpSpPr>
+      <p:sp>
+        <p:nvSpPr>
+          <p:cNvPr id="2" name="Slide Image Placeholder 1"/>
+          <p:cNvSpPr>
+            <a:spLocks noGrp="1" noRot="1" noChangeAspect="1"/>
+          </p:cNvSpPr>
+          <p:nvPr>
+            <p:ph type="sldImg"/>
+          </p:nvPr>
+        </p:nvSpPr>
+        <p:spPr/>
+      </p:sp>
+      <p:sp>
+        <p:nvSpPr>
+          <p:cNvPr id="3" name="Notes Placeholder 2"/>
+          <p:cNvSpPr>
+            <a:spLocks noGrp="1"/>
+          </p:cNvSpPr>
+          <p:nvPr>
+            <p:ph type="body" idx="1"/>
+          </p:nvPr>
+        </p:nvSpPr>
+        <p:spPr/>
+        <p:txBody>
+          <a:bodyPr/>
+          <a:lstStyle/>
+          <a:p>
+            <a:r>
+              <a:rPr lang="en-US" dirty="0"/>
+              <a:t>첫 요청은 콜드스타트로 몇 초 걸릴 수 있다. 제출 직전에 한 번 열어 두면 대기 화면 없이 열린다.</a:t>
+            </a:r>
+            <a:endParaRPr lang="en-US" dirty="0"/>
+          </a:p>
+        </p:txBody>
+      </p:sp>
+      <p:sp>
+        <p:nvSpPr>
+          <p:cNvPr id="4" name="Slide Number Placeholder 3"/>
+          <p:cNvSpPr>
+            <a:spLocks noGrp="1"/>
+          </p:cNvSpPr>
+          <p:nvPr>
+            <p:ph type="sldNum" sz="quarter" idx="10"/>
+          </p:nvPr>
+        </p:nvSpPr>
+        <p:spPr/>
+        <p:txBody>
+          <a:bodyPr/>
+          <a:lstStyle/>
+          <a:p>
+            <a:fld id="{F7021451-1387-4CA6-816F-3879F97B5CBC}" type="slidenum">
+              <a:rPr lang="en-US"/>
+              <a:t>15</a:t>
             </a:fld>
             <a:endParaRPr lang="en-US"/>
           </a:p>
@@ -2346,6 +2435,559 @@
     <p:bg>
       <p:bgPr>
         <a:solidFill>
+          <a:srgbClr val="F3F0E9"/>
+        </a:solidFill>
+      </p:bgPr>
+    </p:bg>
+    <p:spTree>
+      <p:nvGrpSpPr>
+        <p:cNvPr id="1" name=""/>
+        <p:cNvGrpSpPr/>
+        <p:nvPr/>
+      </p:nvGrpSpPr>
+      <p:grpSpPr>
+        <a:xfrm>
+          <a:off x="0" y="0"/>
+          <a:ext cx="0" cy="0"/>
+          <a:chOff x="0" y="0"/>
+          <a:chExt cx="0" cy="0"/>
+        </a:xfrm>
+      </p:grpSpPr>
+      <p:sp>
+        <p:nvSpPr>
+          <p:cNvPr id="2" name="Shape 0"/>
+          <p:cNvSpPr/>
+          <p:nvPr/>
+        </p:nvSpPr>
+        <p:spPr>
+          <a:xfrm>
+            <a:off x="685800" y="384048"/>
+            <a:ext cx="1691640" cy="274320"/>
+          </a:xfrm>
+          <a:prstGeom prst="rect">
+            <a:avLst/>
+          </a:prstGeom>
+          <a:solidFill>
+            <a:srgbClr val="1F3C2E"/>
+          </a:solidFill>
+          <a:ln/>
+        </p:spPr>
+      </p:sp>
+      <p:sp>
+        <p:nvSpPr>
+          <p:cNvPr id="3" name="Text 1"/>
+          <p:cNvSpPr txBox="1"/>
+          <p:nvPr/>
+        </p:nvSpPr>
+        <p:spPr>
+          <a:xfrm>
+            <a:off x="685800" y="384048"/>
+            <a:ext cx="1691640" cy="274320"/>
+          </a:xfrm>
+          <a:prstGeom prst="rect">
+            <a:avLst/>
+          </a:prstGeom>
+          <a:noFill/>
+          <a:ln/>
+        </p:spPr>
+        <p:txBody>
+          <a:bodyPr wrap="square" lIns="0" tIns="0" rIns="0" bIns="0" rtlCol="0" anchor="ctr"/>
+          <a:lstStyle/>
+          <a:p>
+            <a:pPr algn="ctr" indent="0" marL="0">
+              <a:buNone/>
+            </a:pPr>
+            <a:r>
+              <a:rPr lang="en-US" sz="1000" b="1" spc="120" kern="0" dirty="0">
+                <a:solidFill>
+                  <a:srgbClr val="C8F04B"/>
+                </a:solidFill>
+                <a:latin typeface="Consolas" pitchFamily="34" charset="0"/>
+                <a:ea typeface="Consolas" pitchFamily="34" charset="-122"/>
+                <a:cs typeface="Consolas" pitchFamily="34" charset="-120"/>
+              </a:rPr>
+              <a:t>C42 ~ C45</a:t>
+            </a:r>
+            <a:endParaRPr lang="en-US" sz="1000" dirty="0"/>
+          </a:p>
+        </p:txBody>
+      </p:sp>
+      <p:sp>
+        <p:nvSpPr>
+          <p:cNvPr id="4" name="Text 2"/>
+          <p:cNvSpPr txBox="1"/>
+          <p:nvPr/>
+        </p:nvSpPr>
+        <p:spPr>
+          <a:xfrm>
+            <a:off x="685800" y="777240"/>
+            <a:ext cx="10820095" cy="822960"/>
+          </a:xfrm>
+          <a:prstGeom prst="rect">
+            <a:avLst/>
+          </a:prstGeom>
+          <a:noFill/>
+          <a:ln/>
+        </p:spPr>
+        <p:txBody>
+          <a:bodyPr wrap="square" lIns="0" tIns="0" rIns="0" bIns="0" rtlCol="0" anchor="ctr"/>
+          <a:lstStyle/>
+          <a:p>
+            <a:pPr indent="0" marL="0">
+              <a:buNone/>
+            </a:pPr>
+            <a:r>
+              <a:rPr lang="en-US" sz="3400" b="1" dirty="0">
+                <a:solidFill>
+                  <a:srgbClr val="171914"/>
+                </a:solidFill>
+                <a:latin typeface="Malgun Gothic" pitchFamily="34" charset="0"/>
+                <a:ea typeface="Malgun Gothic" pitchFamily="34" charset="-122"/>
+                <a:cs typeface="Malgun Gothic" pitchFamily="34" charset="-120"/>
+              </a:rPr>
+              <a:t>기기를 잃어버렸을 때</a:t>
+            </a:r>
+            <a:endParaRPr lang="en-US" sz="3400" dirty="0"/>
+          </a:p>
+        </p:txBody>
+      </p:sp>
+      <p:sp>
+        <p:nvSpPr>
+          <p:cNvPr id="5" name="Text 3"/>
+          <p:cNvSpPr txBox="1"/>
+          <p:nvPr/>
+        </p:nvSpPr>
+        <p:spPr>
+          <a:xfrm>
+            <a:off x="713232" y="1600200"/>
+            <a:ext cx="10728655" cy="411480"/>
+          </a:xfrm>
+          <a:prstGeom prst="rect">
+            <a:avLst/>
+          </a:prstGeom>
+          <a:noFill/>
+          <a:ln/>
+        </p:spPr>
+        <p:txBody>
+          <a:bodyPr wrap="square" lIns="0" tIns="0" rIns="0" bIns="0" rtlCol="0" anchor="ctr"/>
+          <a:lstStyle/>
+          <a:p>
+            <a:pPr indent="0" marL="0">
+              <a:buNone/>
+            </a:pPr>
+            <a:r>
+              <a:rPr lang="en-US" sz="1350" dirty="0">
+                <a:solidFill>
+                  <a:srgbClr val="66695F"/>
+                </a:solidFill>
+                <a:latin typeface="Malgun Gothic" pitchFamily="34" charset="0"/>
+                <a:ea typeface="Malgun Gothic" pitchFamily="34" charset="-122"/>
+                <a:cs typeface="Malgun Gothic" pitchFamily="34" charset="-120"/>
+              </a:rPr>
+              <a:t>패스키를 두 개 등록하고, 하나를 지운 뒤에도 들어갑니다.</a:t>
+            </a:r>
+            <a:endParaRPr lang="en-US" sz="1350" dirty="0"/>
+          </a:p>
+        </p:txBody>
+      </p:sp>
+      <p:pic>
+        <p:nvPicPr>
+          <p:cNvPr id="6" name="Image 0" descr="C:\Users\user\AppData\Local\Temp\claude\C--gov-SKT-ALEPH\cf4dd2c2-cb26-4d3f-b130-1daf6ea3bd70\scratchpad\shots\08-two-passkeys.png">    </p:cNvPr>
+          <p:cNvPicPr>
+            <a:picLocks noChangeAspect="1"/>
+          </p:cNvPicPr>
+          <p:nvPr/>
+        </p:nvPicPr>
+        <p:blipFill>
+          <a:blip r:embed="rId1"/>
+          <a:stretch>
+            <a:fillRect/>
+          </a:stretch>
+        </p:blipFill>
+        <p:spPr>
+          <a:xfrm>
+            <a:off x="685800" y="2240280"/>
+            <a:ext cx="3291840" cy="2212848"/>
+          </a:xfrm>
+          <a:prstGeom prst="rect">
+            <a:avLst/>
+          </a:prstGeom>
+        </p:spPr>
+      </p:pic>
+      <p:sp>
+        <p:nvSpPr>
+          <p:cNvPr id="7" name="Text 4"/>
+          <p:cNvSpPr txBox="1"/>
+          <p:nvPr/>
+        </p:nvSpPr>
+        <p:spPr>
+          <a:xfrm>
+            <a:off x="685800" y="4590288"/>
+            <a:ext cx="3291840" cy="310896"/>
+          </a:xfrm>
+          <a:prstGeom prst="rect">
+            <a:avLst/>
+          </a:prstGeom>
+          <a:noFill/>
+          <a:ln/>
+        </p:spPr>
+        <p:txBody>
+          <a:bodyPr wrap="square" lIns="0" tIns="0" rIns="0" bIns="0" rtlCol="0" anchor="ctr"/>
+          <a:lstStyle/>
+          <a:p>
+            <a:pPr indent="0" marL="0">
+              <a:buNone/>
+            </a:pPr>
+            <a:r>
+              <a:rPr lang="en-US" sz="1300" b="1" dirty="0">
+                <a:solidFill>
+                  <a:srgbClr val="1F3C2E"/>
+                </a:solidFill>
+                <a:latin typeface="Malgun Gothic" pitchFamily="34" charset="0"/>
+                <a:ea typeface="Malgun Gothic" pitchFamily="34" charset="-122"/>
+                <a:cs typeface="Malgun Gothic" pitchFamily="34" charset="-120"/>
+              </a:rPr>
+              <a:t>1. 두 개 등록</a:t>
+            </a:r>
+            <a:endParaRPr lang="en-US" sz="1300" dirty="0"/>
+          </a:p>
+        </p:txBody>
+      </p:sp>
+      <p:sp>
+        <p:nvSpPr>
+          <p:cNvPr id="8" name="Text 5"/>
+          <p:cNvSpPr txBox="1"/>
+          <p:nvPr/>
+        </p:nvSpPr>
+        <p:spPr>
+          <a:xfrm>
+            <a:off x="685800" y="4956048"/>
+            <a:ext cx="3291840" cy="365760"/>
+          </a:xfrm>
+          <a:prstGeom prst="rect">
+            <a:avLst/>
+          </a:prstGeom>
+          <a:noFill/>
+          <a:ln/>
+        </p:spPr>
+        <p:txBody>
+          <a:bodyPr wrap="square" lIns="0" tIns="0" rIns="0" bIns="0" rtlCol="0" anchor="ctr"/>
+          <a:lstStyle/>
+          <a:p>
+            <a:pPr indent="0" marL="0">
+              <a:buNone/>
+            </a:pPr>
+            <a:r>
+              <a:rPr lang="en-US" sz="1150" dirty="0">
+                <a:solidFill>
+                  <a:srgbClr val="66695F"/>
+                </a:solidFill>
+                <a:latin typeface="Malgun Gothic" pitchFamily="34" charset="0"/>
+                <a:ea typeface="Malgun Gothic" pitchFamily="34" charset="-122"/>
+                <a:cs typeface="Malgun Gothic" pitchFamily="34" charset="-120"/>
+              </a:rPr>
+              <a:t>내 휴대폰 · 예비 보안 키</a:t>
+            </a:r>
+            <a:endParaRPr lang="en-US" sz="1150" dirty="0"/>
+          </a:p>
+        </p:txBody>
+      </p:sp>
+      <p:pic>
+        <p:nvPicPr>
+          <p:cNvPr id="9" name="Image 1" descr="C:\Users\user\AppData\Local\Temp\claude\C--gov-SKT-ALEPH\cf4dd2c2-cb26-4d3f-b130-1daf6ea3bd70\scratchpad\shots\09-after-deleting-first.png">    </p:cNvPr>
+          <p:cNvPicPr>
+            <a:picLocks noChangeAspect="1"/>
+          </p:cNvPicPr>
+          <p:nvPr/>
+        </p:nvPicPr>
+        <p:blipFill>
+          <a:blip r:embed="rId2"/>
+          <a:stretch>
+            <a:fillRect/>
+          </a:stretch>
+        </p:blipFill>
+        <p:spPr>
+          <a:xfrm>
+            <a:off x="4343400" y="2240280"/>
+            <a:ext cx="3291840" cy="2212848"/>
+          </a:xfrm>
+          <a:prstGeom prst="rect">
+            <a:avLst/>
+          </a:prstGeom>
+        </p:spPr>
+      </p:pic>
+      <p:sp>
+        <p:nvSpPr>
+          <p:cNvPr id="10" name="Text 6"/>
+          <p:cNvSpPr txBox="1"/>
+          <p:nvPr/>
+        </p:nvSpPr>
+        <p:spPr>
+          <a:xfrm>
+            <a:off x="4343400" y="4590288"/>
+            <a:ext cx="3291840" cy="310896"/>
+          </a:xfrm>
+          <a:prstGeom prst="rect">
+            <a:avLst/>
+          </a:prstGeom>
+          <a:noFill/>
+          <a:ln/>
+        </p:spPr>
+        <p:txBody>
+          <a:bodyPr wrap="square" lIns="0" tIns="0" rIns="0" bIns="0" rtlCol="0" anchor="ctr"/>
+          <a:lstStyle/>
+          <a:p>
+            <a:pPr indent="0" marL="0">
+              <a:buNone/>
+            </a:pPr>
+            <a:r>
+              <a:rPr lang="en-US" sz="1300" b="1" dirty="0">
+                <a:solidFill>
+                  <a:srgbClr val="1F3C2E"/>
+                </a:solidFill>
+                <a:latin typeface="Malgun Gothic" pitchFamily="34" charset="0"/>
+                <a:ea typeface="Malgun Gothic" pitchFamily="34" charset="-122"/>
+                <a:cs typeface="Malgun Gothic" pitchFamily="34" charset="-120"/>
+              </a:rPr>
+              <a:t>2. 하나 삭제</a:t>
+            </a:r>
+            <a:endParaRPr lang="en-US" sz="1300" dirty="0"/>
+          </a:p>
+        </p:txBody>
+      </p:sp>
+      <p:sp>
+        <p:nvSpPr>
+          <p:cNvPr id="11" name="Text 7"/>
+          <p:cNvSpPr txBox="1"/>
+          <p:nvPr/>
+        </p:nvSpPr>
+        <p:spPr>
+          <a:xfrm>
+            <a:off x="4343400" y="4956048"/>
+            <a:ext cx="3291840" cy="365760"/>
+          </a:xfrm>
+          <a:prstGeom prst="rect">
+            <a:avLst/>
+          </a:prstGeom>
+          <a:noFill/>
+          <a:ln/>
+        </p:spPr>
+        <p:txBody>
+          <a:bodyPr wrap="square" lIns="0" tIns="0" rIns="0" bIns="0" rtlCol="0" anchor="ctr"/>
+          <a:lstStyle/>
+          <a:p>
+            <a:pPr indent="0" marL="0">
+              <a:buNone/>
+            </a:pPr>
+            <a:r>
+              <a:rPr lang="en-US" sz="1150" dirty="0">
+                <a:solidFill>
+                  <a:srgbClr val="66695F"/>
+                </a:solidFill>
+                <a:latin typeface="Malgun Gothic" pitchFamily="34" charset="0"/>
+                <a:ea typeface="Malgun Gothic" pitchFamily="34" charset="-122"/>
+                <a:cs typeface="Malgun Gothic" pitchFamily="34" charset="-120"/>
+              </a:rPr>
+              <a:t>내 휴대폰을 지웠습니다</a:t>
+            </a:r>
+            <a:endParaRPr lang="en-US" sz="1150" dirty="0"/>
+          </a:p>
+        </p:txBody>
+      </p:sp>
+      <p:pic>
+        <p:nvPicPr>
+          <p:cNvPr id="12" name="Image 2" descr="C:\Users\user\AppData\Local\Temp\claude\C--gov-SKT-ALEPH\cf4dd2c2-cb26-4d3f-b130-1daf6ea3bd70\scratchpad\shots\11-login-with-remaining-passkey.png">    </p:cNvPr>
+          <p:cNvPicPr>
+            <a:picLocks noChangeAspect="1"/>
+          </p:cNvPicPr>
+          <p:nvPr/>
+        </p:nvPicPr>
+        <p:blipFill>
+          <a:blip r:embed="rId3"/>
+          <a:stretch>
+            <a:fillRect/>
+          </a:stretch>
+        </p:blipFill>
+        <p:spPr>
+          <a:xfrm>
+            <a:off x="8001000" y="2240280"/>
+            <a:ext cx="3291840" cy="2212848"/>
+          </a:xfrm>
+          <a:prstGeom prst="rect">
+            <a:avLst/>
+          </a:prstGeom>
+        </p:spPr>
+      </p:pic>
+      <p:sp>
+        <p:nvSpPr>
+          <p:cNvPr id="13" name="Text 8"/>
+          <p:cNvSpPr txBox="1"/>
+          <p:nvPr/>
+        </p:nvSpPr>
+        <p:spPr>
+          <a:xfrm>
+            <a:off x="8001000" y="4590288"/>
+            <a:ext cx="3291840" cy="310896"/>
+          </a:xfrm>
+          <a:prstGeom prst="rect">
+            <a:avLst/>
+          </a:prstGeom>
+          <a:noFill/>
+          <a:ln/>
+        </p:spPr>
+        <p:txBody>
+          <a:bodyPr wrap="square" lIns="0" tIns="0" rIns="0" bIns="0" rtlCol="0" anchor="ctr"/>
+          <a:lstStyle/>
+          <a:p>
+            <a:pPr indent="0" marL="0">
+              <a:buNone/>
+            </a:pPr>
+            <a:r>
+              <a:rPr lang="en-US" sz="1300" b="1" dirty="0">
+                <a:solidFill>
+                  <a:srgbClr val="1F3C2E"/>
+                </a:solidFill>
+                <a:latin typeface="Malgun Gothic" pitchFamily="34" charset="0"/>
+                <a:ea typeface="Malgun Gothic" pitchFamily="34" charset="-122"/>
+                <a:cs typeface="Malgun Gothic" pitchFamily="34" charset="-120"/>
+              </a:rPr>
+              <a:t>3. 남은 것으로 로그인</a:t>
+            </a:r>
+            <a:endParaRPr lang="en-US" sz="1300" dirty="0"/>
+          </a:p>
+        </p:txBody>
+      </p:sp>
+      <p:sp>
+        <p:nvSpPr>
+          <p:cNvPr id="14" name="Text 9"/>
+          <p:cNvSpPr txBox="1"/>
+          <p:nvPr/>
+        </p:nvSpPr>
+        <p:spPr>
+          <a:xfrm>
+            <a:off x="8001000" y="4956048"/>
+            <a:ext cx="3291840" cy="365760"/>
+          </a:xfrm>
+          <a:prstGeom prst="rect">
+            <a:avLst/>
+          </a:prstGeom>
+          <a:noFill/>
+          <a:ln/>
+        </p:spPr>
+        <p:txBody>
+          <a:bodyPr wrap="square" lIns="0" tIns="0" rIns="0" bIns="0" rtlCol="0" anchor="ctr"/>
+          <a:lstStyle/>
+          <a:p>
+            <a:pPr indent="0" marL="0">
+              <a:buNone/>
+            </a:pPr>
+            <a:r>
+              <a:rPr lang="en-US" sz="1150" dirty="0">
+                <a:solidFill>
+                  <a:srgbClr val="66695F"/>
+                </a:solidFill>
+                <a:latin typeface="Malgun Gothic" pitchFamily="34" charset="0"/>
+                <a:ea typeface="Malgun Gothic" pitchFamily="34" charset="-122"/>
+                <a:cs typeface="Malgun Gothic" pitchFamily="34" charset="-120"/>
+              </a:rPr>
+              <a:t>예비 보안 키로 통과</a:t>
+            </a:r>
+            <a:endParaRPr lang="en-US" sz="1150" dirty="0"/>
+          </a:p>
+        </p:txBody>
+      </p:sp>
+      <p:sp>
+        <p:nvSpPr>
+          <p:cNvPr id="15" name="Text 10"/>
+          <p:cNvSpPr txBox="1"/>
+          <p:nvPr/>
+        </p:nvSpPr>
+        <p:spPr>
+          <a:xfrm>
+            <a:off x="713232" y="5532120"/>
+            <a:ext cx="10789920" cy="365760"/>
+          </a:xfrm>
+          <a:prstGeom prst="rect">
+            <a:avLst/>
+          </a:prstGeom>
+          <a:noFill/>
+          <a:ln/>
+        </p:spPr>
+        <p:txBody>
+          <a:bodyPr wrap="square" lIns="0" tIns="0" rIns="0" bIns="0" rtlCol="0" anchor="ctr"/>
+          <a:lstStyle/>
+          <a:p>
+            <a:pPr indent="0" marL="0">
+              <a:buNone/>
+            </a:pPr>
+            <a:r>
+              <a:rPr lang="en-US" sz="1200" dirty="0">
+                <a:solidFill>
+                  <a:srgbClr val="171914"/>
+                </a:solidFill>
+                <a:latin typeface="Malgun Gothic" pitchFamily="34" charset="0"/>
+                <a:ea typeface="Malgun Gothic" pitchFamily="34" charset="-122"/>
+                <a:cs typeface="Malgun Gothic" pitchFamily="34" charset="-120"/>
+              </a:rPr>
+              <a:t>지운 패스키로는 더 이상 들어갈 수 없습니다. 남은 하나로는 그대로 들어갑니다.</a:t>
+            </a:r>
+            <a:endParaRPr lang="en-US" sz="1200" dirty="0"/>
+          </a:p>
+        </p:txBody>
+      </p:sp>
+      <p:sp>
+        <p:nvSpPr>
+          <p:cNvPr id="16" name="Text 11"/>
+          <p:cNvSpPr txBox="1"/>
+          <p:nvPr/>
+        </p:nvSpPr>
+        <p:spPr>
+          <a:xfrm>
+            <a:off x="685800" y="6291072"/>
+            <a:ext cx="10820095" cy="274320"/>
+          </a:xfrm>
+          <a:prstGeom prst="rect">
+            <a:avLst/>
+          </a:prstGeom>
+          <a:noFill/>
+          <a:ln/>
+        </p:spPr>
+        <p:txBody>
+          <a:bodyPr wrap="square" lIns="0" tIns="0" rIns="0" bIns="0" rtlCol="0" anchor="ctr"/>
+          <a:lstStyle/>
+          <a:p>
+            <a:pPr indent="0" marL="0">
+              <a:buNone/>
+            </a:pPr>
+            <a:r>
+              <a:rPr lang="en-US" sz="950" dirty="0">
+                <a:solidFill>
+                  <a:srgbClr val="66695F"/>
+                </a:solidFill>
+                <a:latin typeface="Consolas" pitchFamily="34" charset="0"/>
+                <a:ea typeface="Consolas" pitchFamily="34" charset="-122"/>
+                <a:cs typeface="Consolas" pitchFamily="34" charset="-120"/>
+              </a:rPr>
+              <a:t>로컬 인스턴스 · 가상 인증기로 실제 등록·삭제·로그인을 수행한 화면</a:t>
+            </a:r>
+            <a:endParaRPr lang="en-US" sz="950" dirty="0"/>
+          </a:p>
+        </p:txBody>
+      </p:sp>
+    </p:spTree>
+  </p:cSld>
+  <p:clrMapOvr>
+    <a:masterClrMapping/>
+  </p:clrMapOvr>
+</p:sld>
+</file>
+
+<file path=ppt/slides/slide11.xml><?xml version="1.0" encoding="utf-8"?>
+<p:sld xmlns:a="http://schemas.openxmlformats.org/drawingml/2006/main" xmlns:r="http://schemas.openxmlformats.org/officeDocument/2006/relationships" xmlns:p="http://schemas.openxmlformats.org/presentationml/2006/main">
+  <p:cSld name="Slide 11">
+    <p:bg>
+      <p:bgPr>
+        <a:solidFill>
           <a:srgbClr val="14170F"/>
         </a:solidFill>
       </p:bgPr>
@@ -2614,9 +3256,9 @@
 </p:sld>
 </file>
 
-<file path=ppt/slides/slide11.xml><?xml version="1.0" encoding="utf-8"?>
+<file path=ppt/slides/slide12.xml><?xml version="1.0" encoding="utf-8"?>
 <p:sld xmlns:a="http://schemas.openxmlformats.org/drawingml/2006/main" xmlns:r="http://schemas.openxmlformats.org/officeDocument/2006/relationships" xmlns:p="http://schemas.openxmlformats.org/presentationml/2006/main">
-  <p:cSld name="Slide 11">
+  <p:cSld name="Slide 12">
     <p:bg>
       <p:bgPr>
         <a:solidFill>
@@ -3758,9 +4400,9 @@
 </p:sld>
 </file>
 
-<file path=ppt/slides/slide12.xml><?xml version="1.0" encoding="utf-8"?>
+<file path=ppt/slides/slide13.xml><?xml version="1.0" encoding="utf-8"?>
 <p:sld xmlns:a="http://schemas.openxmlformats.org/drawingml/2006/main" xmlns:r="http://schemas.openxmlformats.org/officeDocument/2006/relationships" xmlns:p="http://schemas.openxmlformats.org/presentationml/2006/main">
-  <p:cSld name="Slide 12">
+  <p:cSld name="Slide 13">
     <p:bg>
       <p:bgPr>
         <a:solidFill>
@@ -4306,9 +4948,9 @@
 </p:sld>
 </file>
 
-<file path=ppt/slides/slide13.xml><?xml version="1.0" encoding="utf-8"?>
+<file path=ppt/slides/slide14.xml><?xml version="1.0" encoding="utf-8"?>
 <p:sld xmlns:a="http://schemas.openxmlformats.org/drawingml/2006/main" xmlns:r="http://schemas.openxmlformats.org/officeDocument/2006/relationships" xmlns:p="http://schemas.openxmlformats.org/presentationml/2006/main">
-  <p:cSld name="Slide 13">
+  <p:cSld name="Slide 14">
     <p:bg>
       <p:bgPr>
         <a:solidFill>
@@ -5613,9 +6255,9 @@
 </p:sld>
 </file>
 
-<file path=ppt/slides/slide14.xml><?xml version="1.0" encoding="utf-8"?>
+<file path=ppt/slides/slide15.xml><?xml version="1.0" encoding="utf-8"?>
 <p:sld xmlns:a="http://schemas.openxmlformats.org/drawingml/2006/main" xmlns:r="http://schemas.openxmlformats.org/officeDocument/2006/relationships" xmlns:p="http://schemas.openxmlformats.org/presentationml/2006/main">
-  <p:cSld name="Slide 14">
+  <p:cSld name="Slide 15">
     <p:bg>
       <p:bgPr>
         <a:solidFill>
@@ -10704,7 +11346,7 @@
     <p:bg>
       <p:bgPr>
         <a:solidFill>
-          <a:srgbClr val="F3F0E9"/>
+          <a:srgbClr val="14170F"/>
         </a:solidFill>
       </p:bgPr>
     </p:bg>
@@ -10737,7 +11379,7 @@
             <a:avLst/>
           </a:prstGeom>
           <a:solidFill>
-            <a:srgbClr val="1F3C2E"/>
+            <a:srgbClr val="C8F04B"/>
           </a:solidFill>
           <a:ln/>
         </p:spPr>
@@ -10769,13 +11411,13 @@
             <a:r>
               <a:rPr lang="en-US" sz="1000" b="1" spc="120" kern="0" dirty="0">
                 <a:solidFill>
-                  <a:srgbClr val="C8F04B"/>
+                  <a:srgbClr val="1F3C2E"/>
                 </a:solidFill>
                 <a:latin typeface="Consolas" pitchFamily="34" charset="0"/>
                 <a:ea typeface="Consolas" pitchFamily="34" charset="-122"/>
                 <a:cs typeface="Consolas" pitchFamily="34" charset="-120"/>
               </a:rPr>
-              <a:t>C42 ~ C45</a:t>
+              <a:t>C26 · REAL DEVICE</a:t>
             </a:r>
             <a:endParaRPr lang="en-US" sz="1000" dirty="0"/>
           </a:p>
@@ -10808,13 +11450,13 @@
             <a:r>
               <a:rPr lang="en-US" sz="3400" b="1" dirty="0">
                 <a:solidFill>
-                  <a:srgbClr val="171914"/>
-                </a:solidFill>
-                <a:latin typeface="Malgun Gothic" pitchFamily="34" charset="0"/>
-                <a:ea typeface="Malgun Gothic" pitchFamily="34" charset="-122"/>
-                <a:cs typeface="Malgun Gothic" pitchFamily="34" charset="-120"/>
-              </a:rPr>
-              <a:t>기기를 잃어버렸을 때</a:t>
+                  <a:srgbClr val="F3F0E9"/>
+                </a:solidFill>
+                <a:latin typeface="Malgun Gothic" pitchFamily="34" charset="0"/>
+                <a:ea typeface="Malgun Gothic" pitchFamily="34" charset="-122"/>
+                <a:cs typeface="Malgun Gothic" pitchFamily="34" charset="-120"/>
+              </a:rPr>
+              <a:t>실물 기기에서 확인했습니다</a:t>
             </a:r>
             <a:endParaRPr lang="en-US" sz="3400" dirty="0"/>
           </a:p>
@@ -10847,13 +11489,13 @@
             <a:r>
               <a:rPr lang="en-US" sz="1350" dirty="0">
                 <a:solidFill>
-                  <a:srgbClr val="66695F"/>
-                </a:solidFill>
-                <a:latin typeface="Malgun Gothic" pitchFamily="34" charset="0"/>
-                <a:ea typeface="Malgun Gothic" pitchFamily="34" charset="-122"/>
-                <a:cs typeface="Malgun Gothic" pitchFamily="34" charset="-120"/>
-              </a:rPr>
-              <a:t>패스키를 두 개 등록하고, 하나를 지운 뒤에도 들어갑니다.</a:t>
+                  <a:srgbClr val="D7DDD5"/>
+                </a:solidFill>
+                <a:latin typeface="Malgun Gothic" pitchFamily="34" charset="0"/>
+                <a:ea typeface="Malgun Gothic" pitchFamily="34" charset="-122"/>
+                <a:cs typeface="Malgun Gothic" pitchFamily="34" charset="-120"/>
+              </a:rPr>
+              <a:t>가상 인증기가 아니라 실제 휴대폰으로 등록하고, 로그아웃한 뒤 같은 패스키로 다시 들어갔습니다.</a:t>
             </a:r>
             <a:endParaRPr lang="en-US" sz="1350" dirty="0"/>
           </a:p>
@@ -10861,7 +11503,7 @@
       </p:sp>
       <p:pic>
         <p:nvPicPr>
-          <p:cNvPr id="6" name="Image 0" descr="C:\Users\user\AppData\Local\Temp\claude\C--gov-SKT-ALEPH\cf4dd2c2-cb26-4d3f-b130-1daf6ea3bd70\scratchpad\shots\08-two-passkeys.png">    </p:cNvPr>
+          <p:cNvPr id="6" name="Image 0" descr="C:\Users\user\AppData\Local\Temp\claude\C--gov-SKT-ALEPH\cf4dd2c2-cb26-4d3f-b130-1daf6ea3bd70\scratchpad\shots\phone-01-passkey-list.png">    </p:cNvPr>
           <p:cNvPicPr>
             <a:picLocks noChangeAspect="1"/>
           </p:cNvPicPr>
@@ -10875,95 +11517,17 @@
         </p:blipFill>
         <p:spPr>
           <a:xfrm>
-            <a:off x="685800" y="2240280"/>
-            <a:ext cx="3291840" cy="2212848"/>
+            <a:off x="685800" y="2148840"/>
+            <a:ext cx="1920240" cy="3790696"/>
           </a:xfrm>
           <a:prstGeom prst="rect">
             <a:avLst/>
           </a:prstGeom>
         </p:spPr>
       </p:pic>
-      <p:sp>
-        <p:nvSpPr>
-          <p:cNvPr id="7" name="Text 4"/>
-          <p:cNvSpPr txBox="1"/>
-          <p:nvPr/>
-        </p:nvSpPr>
-        <p:spPr>
-          <a:xfrm>
-            <a:off x="685800" y="4590288"/>
-            <a:ext cx="3291840" cy="310896"/>
-          </a:xfrm>
-          <a:prstGeom prst="rect">
-            <a:avLst/>
-          </a:prstGeom>
-          <a:noFill/>
-          <a:ln/>
-        </p:spPr>
-        <p:txBody>
-          <a:bodyPr wrap="square" lIns="0" tIns="0" rIns="0" bIns="0" rtlCol="0" anchor="ctr"/>
-          <a:lstStyle/>
-          <a:p>
-            <a:pPr indent="0" marL="0">
-              <a:buNone/>
-            </a:pPr>
-            <a:r>
-              <a:rPr lang="en-US" sz="1300" b="1" dirty="0">
-                <a:solidFill>
-                  <a:srgbClr val="1F3C2E"/>
-                </a:solidFill>
-                <a:latin typeface="Malgun Gothic" pitchFamily="34" charset="0"/>
-                <a:ea typeface="Malgun Gothic" pitchFamily="34" charset="-122"/>
-                <a:cs typeface="Malgun Gothic" pitchFamily="34" charset="-120"/>
-              </a:rPr>
-              <a:t>1. 두 개 등록</a:t>
-            </a:r>
-            <a:endParaRPr lang="en-US" sz="1300" dirty="0"/>
-          </a:p>
-        </p:txBody>
-      </p:sp>
-      <p:sp>
-        <p:nvSpPr>
-          <p:cNvPr id="8" name="Text 5"/>
-          <p:cNvSpPr txBox="1"/>
-          <p:nvPr/>
-        </p:nvSpPr>
-        <p:spPr>
-          <a:xfrm>
-            <a:off x="685800" y="4956048"/>
-            <a:ext cx="3291840" cy="365760"/>
-          </a:xfrm>
-          <a:prstGeom prst="rect">
-            <a:avLst/>
-          </a:prstGeom>
-          <a:noFill/>
-          <a:ln/>
-        </p:spPr>
-        <p:txBody>
-          <a:bodyPr wrap="square" lIns="0" tIns="0" rIns="0" bIns="0" rtlCol="0" anchor="ctr"/>
-          <a:lstStyle/>
-          <a:p>
-            <a:pPr indent="0" marL="0">
-              <a:buNone/>
-            </a:pPr>
-            <a:r>
-              <a:rPr lang="en-US" sz="1150" dirty="0">
-                <a:solidFill>
-                  <a:srgbClr val="66695F"/>
-                </a:solidFill>
-                <a:latin typeface="Malgun Gothic" pitchFamily="34" charset="0"/>
-                <a:ea typeface="Malgun Gothic" pitchFamily="34" charset="-122"/>
-                <a:cs typeface="Malgun Gothic" pitchFamily="34" charset="-120"/>
-              </a:rPr>
-              <a:t>내 휴대폰 · 예비 보안 키</a:t>
-            </a:r>
-            <a:endParaRPr lang="en-US" sz="1150" dirty="0"/>
-          </a:p>
-        </p:txBody>
-      </p:sp>
       <p:pic>
         <p:nvPicPr>
-          <p:cNvPr id="9" name="Image 1" descr="C:\Users\user\AppData\Local\Temp\claude\C--gov-SKT-ALEPH\cf4dd2c2-cb26-4d3f-b130-1daf6ea3bd70\scratchpad\shots\09-after-deleting-first.png">    </p:cNvPr>
+          <p:cNvPr id="7" name="Image 1" descr="C:\Users\user\AppData\Local\Temp\claude\C--gov-SKT-ALEPH\cf4dd2c2-cb26-4d3f-b130-1daf6ea3bd70\scratchpad\shots\phone-02-google-manager.png">    </p:cNvPr>
           <p:cNvPicPr>
             <a:picLocks noChangeAspect="1"/>
           </p:cNvPicPr>
@@ -10977,8 +11541,8 @@
         </p:blipFill>
         <p:spPr>
           <a:xfrm>
-            <a:off x="4343400" y="2240280"/>
-            <a:ext cx="3291840" cy="2212848"/>
+            <a:off x="2880360" y="2148840"/>
+            <a:ext cx="1920240" cy="3790696"/>
           </a:xfrm>
           <a:prstGeom prst="rect">
             <a:avLst/>
@@ -10987,42 +11551,163 @@
       </p:pic>
       <p:sp>
         <p:nvSpPr>
-          <p:cNvPr id="10" name="Text 6"/>
-          <p:cNvSpPr txBox="1"/>
-          <p:nvPr/>
-        </p:nvSpPr>
-        <p:spPr>
-          <a:xfrm>
-            <a:off x="4343400" y="4590288"/>
-            <a:ext cx="3291840" cy="310896"/>
-          </a:xfrm>
-          <a:prstGeom prst="rect">
-            <a:avLst/>
-          </a:prstGeom>
-          <a:noFill/>
-          <a:ln/>
-        </p:spPr>
-        <p:txBody>
-          <a:bodyPr wrap="square" lIns="0" tIns="0" rIns="0" bIns="0" rtlCol="0" anchor="ctr"/>
-          <a:lstStyle/>
-          <a:p>
-            <a:pPr indent="0" marL="0">
-              <a:buNone/>
-            </a:pPr>
-            <a:r>
-              <a:rPr lang="en-US" sz="1300" b="1" dirty="0">
-                <a:solidFill>
-                  <a:srgbClr val="1F3C2E"/>
-                </a:solidFill>
-                <a:latin typeface="Malgun Gothic" pitchFamily="34" charset="0"/>
-                <a:ea typeface="Malgun Gothic" pitchFamily="34" charset="-122"/>
-                <a:cs typeface="Malgun Gothic" pitchFamily="34" charset="-120"/>
-              </a:rPr>
-              <a:t>2. 하나 삭제</a:t>
-            </a:r>
-            <a:endParaRPr lang="en-US" sz="1300" dirty="0"/>
-          </a:p>
-        </p:txBody>
+          <p:cNvPr id="8" name="Text 4"/>
+          <p:cNvSpPr txBox="1"/>
+          <p:nvPr/>
+        </p:nvSpPr>
+        <p:spPr>
+          <a:xfrm>
+            <a:off x="5349240" y="2240280"/>
+            <a:ext cx="6156655" cy="365760"/>
+          </a:xfrm>
+          <a:prstGeom prst="rect">
+            <a:avLst/>
+          </a:prstGeom>
+          <a:noFill/>
+          <a:ln/>
+        </p:spPr>
+        <p:txBody>
+          <a:bodyPr wrap="square" lIns="0" tIns="0" rIns="0" bIns="0" rtlCol="0" anchor="ctr"/>
+          <a:lstStyle/>
+          <a:p>
+            <a:pPr indent="0" marL="0">
+              <a:buNone/>
+            </a:pPr>
+            <a:r>
+              <a:rPr lang="en-US" sz="1500" b="1" dirty="0">
+                <a:solidFill>
+                  <a:srgbClr val="C8F04B"/>
+                </a:solidFill>
+                <a:latin typeface="Malgun Gothic" pitchFamily="34" charset="0"/>
+                <a:ea typeface="Malgun Gothic" pitchFamily="34" charset="-122"/>
+                <a:cs typeface="Malgun Gothic" pitchFamily="34" charset="-120"/>
+              </a:rPr>
+              <a:t>두 화면이 같은 것을 가리킵니다</a:t>
+            </a:r>
+            <a:endParaRPr lang="en-US" sz="1500" dirty="0"/>
+          </a:p>
+        </p:txBody>
+      </p:sp>
+      <p:sp>
+        <p:nvSpPr>
+          <p:cNvPr id="9" name="Text 5"/>
+          <p:cNvSpPr txBox="1"/>
+          <p:nvPr/>
+        </p:nvSpPr>
+        <p:spPr>
+          <a:xfrm>
+            <a:off x="5349240" y="2788920"/>
+            <a:ext cx="6156655" cy="1645920"/>
+          </a:xfrm>
+          <a:prstGeom prst="rect">
+            <a:avLst/>
+          </a:prstGeom>
+          <a:noFill/>
+          <a:ln/>
+        </p:spPr>
+        <p:txBody>
+          <a:bodyPr wrap="square" lIns="0" tIns="0" rIns="0" bIns="0" rtlCol="0" anchor="ctr"/>
+          <a:lstStyle/>
+          <a:p>
+            <a:pPr marL="342900" indent="-342900">
+              <a:lnSpc>
+                <a:spcPts val="1700"/>
+              </a:lnSpc>
+              <a:spcAft>
+                <a:spcPts val="800"/>
+              </a:spcAft>
+              <a:buSzPct val="100000"/>
+              <a:buChar char="•"/>
+            </a:pPr>
+            <a:r>
+              <a:rPr lang="en-US" sz="1200" dirty="0">
+                <a:solidFill>
+                  <a:srgbClr val="D7DDD5"/>
+                </a:solidFill>
+                <a:latin typeface="Malgun Gothic" pitchFamily="34" charset="0"/>
+                <a:ea typeface="Malgun Gothic" pitchFamily="34" charset="-122"/>
+                <a:cs typeface="Malgun Gothic" pitchFamily="34" charset="-120"/>
+              </a:rPr>
+              <a:t>왼쪽 — 목록의 “동기화됨 · 이 기기” 배지</a:t>
+            </a:r>
+            <a:endParaRPr lang="en-US" sz="1200" dirty="0"/>
+          </a:p>
+          <a:p>
+            <a:pPr marL="342900" indent="-342900">
+              <a:lnSpc>
+                <a:spcPts val="1700"/>
+              </a:lnSpc>
+              <a:spcAft>
+                <a:spcPts val="800"/>
+              </a:spcAft>
+              <a:buSzPct val="100000"/>
+              <a:buChar char="•"/>
+            </a:pPr>
+            <a:r>
+              <a:rPr lang="en-US" sz="1200" dirty="0">
+                <a:solidFill>
+                  <a:srgbClr val="D7DDD5"/>
+                </a:solidFill>
+                <a:latin typeface="Malgun Gothic" pitchFamily="34" charset="0"/>
+                <a:ea typeface="Malgun Gothic" pitchFamily="34" charset="-122"/>
+                <a:cs typeface="Malgun Gothic" pitchFamily="34" charset="-120"/>
+              </a:rPr>
+              <a:t>오른쪽 — 보관처가 Google 비밀번호 관리자임을 확인해 주는 창</a:t>
+            </a:r>
+            <a:endParaRPr lang="en-US" sz="1200" dirty="0"/>
+          </a:p>
+          <a:p>
+            <a:pPr marL="342900" indent="-342900">
+              <a:lnSpc>
+                <a:spcPts val="1700"/>
+              </a:lnSpc>
+              <a:spcAft>
+                <a:spcPts val="800"/>
+              </a:spcAft>
+              <a:buSzPct val="100000"/>
+              <a:buChar char="•"/>
+            </a:pPr>
+            <a:r>
+              <a:rPr lang="en-US" sz="1200" dirty="0">
+                <a:solidFill>
+                  <a:srgbClr val="D7DDD5"/>
+                </a:solidFill>
+                <a:latin typeface="Malgun Gothic" pitchFamily="34" charset="0"/>
+                <a:ea typeface="Malgun Gothic" pitchFamily="34" charset="-122"/>
+                <a:cs typeface="Malgun Gothic" pitchFamily="34" charset="-120"/>
+              </a:rPr>
+              <a:t>기기 자체도 보안 키도 아닙니다</a:t>
+            </a:r>
+            <a:endParaRPr lang="en-US" sz="1200" dirty="0"/>
+          </a:p>
+        </p:txBody>
+      </p:sp>
+      <p:sp>
+        <p:nvSpPr>
+          <p:cNvPr id="10" name="Shape 6"/>
+          <p:cNvSpPr/>
+          <p:nvPr/>
+        </p:nvSpPr>
+        <p:spPr>
+          <a:xfrm>
+            <a:off x="5349240" y="4526280"/>
+            <a:ext cx="6156655" cy="1417320"/>
+          </a:xfrm>
+          <a:prstGeom prst="roundRect">
+            <a:avLst>
+              <a:gd name="adj" fmla="val 2581"/>
+            </a:avLst>
+          </a:prstGeom>
+          <a:solidFill>
+            <a:srgbClr val="1E2219"/>
+          </a:solidFill>
+          <a:ln w="12700">
+            <a:solidFill>
+              <a:srgbClr val="3A443B"/>
+            </a:solidFill>
+            <a:prstDash val="solid"/>
+          </a:ln>
+        </p:spPr>
       </p:sp>
       <p:sp>
         <p:nvSpPr>
@@ -11032,181 +11717,85 @@
         </p:nvSpPr>
         <p:spPr>
           <a:xfrm>
-            <a:off x="4343400" y="4956048"/>
-            <a:ext cx="3291840" cy="365760"/>
-          </a:xfrm>
-          <a:prstGeom prst="rect">
-            <a:avLst/>
-          </a:prstGeom>
-          <a:noFill/>
-          <a:ln/>
-        </p:spPr>
-        <p:txBody>
-          <a:bodyPr wrap="square" lIns="0" tIns="0" rIns="0" bIns="0" rtlCol="0" anchor="ctr"/>
-          <a:lstStyle/>
-          <a:p>
-            <a:pPr indent="0" marL="0">
-              <a:buNone/>
-            </a:pPr>
-            <a:r>
-              <a:rPr lang="en-US" sz="1150" dirty="0">
-                <a:solidFill>
-                  <a:srgbClr val="66695F"/>
-                </a:solidFill>
-                <a:latin typeface="Malgun Gothic" pitchFamily="34" charset="0"/>
-                <a:ea typeface="Malgun Gothic" pitchFamily="34" charset="-122"/>
-                <a:cs typeface="Malgun Gothic" pitchFamily="34" charset="-120"/>
-              </a:rPr>
-              <a:t>내 휴대폰을 지웠습니다</a:t>
-            </a:r>
-            <a:endParaRPr lang="en-US" sz="1150" dirty="0"/>
-          </a:p>
-        </p:txBody>
-      </p:sp>
-      <p:pic>
-        <p:nvPicPr>
-          <p:cNvPr id="12" name="Image 2" descr="C:\Users\user\AppData\Local\Temp\claude\C--gov-SKT-ALEPH\cf4dd2c2-cb26-4d3f-b130-1daf6ea3bd70\scratchpad\shots\11-login-with-remaining-passkey.png">    </p:cNvPr>
-          <p:cNvPicPr>
-            <a:picLocks noChangeAspect="1"/>
-          </p:cNvPicPr>
-          <p:nvPr/>
-        </p:nvPicPr>
-        <p:blipFill>
-          <a:blip r:embed="rId3"/>
-          <a:stretch>
-            <a:fillRect/>
-          </a:stretch>
-        </p:blipFill>
-        <p:spPr>
-          <a:xfrm>
-            <a:off x="8001000" y="2240280"/>
-            <a:ext cx="3291840" cy="2212848"/>
-          </a:xfrm>
-          <a:prstGeom prst="rect">
-            <a:avLst/>
-          </a:prstGeom>
-        </p:spPr>
-      </p:pic>
-      <p:sp>
-        <p:nvSpPr>
-          <p:cNvPr id="13" name="Text 8"/>
-          <p:cNvSpPr txBox="1"/>
-          <p:nvPr/>
-        </p:nvSpPr>
-        <p:spPr>
-          <a:xfrm>
-            <a:off x="8001000" y="4590288"/>
-            <a:ext cx="3291840" cy="310896"/>
-          </a:xfrm>
-          <a:prstGeom prst="rect">
-            <a:avLst/>
-          </a:prstGeom>
-          <a:noFill/>
-          <a:ln/>
-        </p:spPr>
-        <p:txBody>
-          <a:bodyPr wrap="square" lIns="0" tIns="0" rIns="0" bIns="0" rtlCol="0" anchor="ctr"/>
-          <a:lstStyle/>
-          <a:p>
-            <a:pPr indent="0" marL="0">
-              <a:buNone/>
-            </a:pPr>
-            <a:r>
-              <a:rPr lang="en-US" sz="1300" b="1" dirty="0">
-                <a:solidFill>
-                  <a:srgbClr val="1F3C2E"/>
-                </a:solidFill>
-                <a:latin typeface="Malgun Gothic" pitchFamily="34" charset="0"/>
-                <a:ea typeface="Malgun Gothic" pitchFamily="34" charset="-122"/>
-                <a:cs typeface="Malgun Gothic" pitchFamily="34" charset="-120"/>
-              </a:rPr>
-              <a:t>3. 남은 것으로 로그인</a:t>
-            </a:r>
-            <a:endParaRPr lang="en-US" sz="1300" dirty="0"/>
-          </a:p>
-        </p:txBody>
-      </p:sp>
-      <p:sp>
-        <p:nvSpPr>
-          <p:cNvPr id="14" name="Text 9"/>
-          <p:cNvSpPr txBox="1"/>
-          <p:nvPr/>
-        </p:nvSpPr>
-        <p:spPr>
-          <a:xfrm>
-            <a:off x="8001000" y="4956048"/>
-            <a:ext cx="3291840" cy="365760"/>
-          </a:xfrm>
-          <a:prstGeom prst="rect">
-            <a:avLst/>
-          </a:prstGeom>
-          <a:noFill/>
-          <a:ln/>
-        </p:spPr>
-        <p:txBody>
-          <a:bodyPr wrap="square" lIns="0" tIns="0" rIns="0" bIns="0" rtlCol="0" anchor="ctr"/>
-          <a:lstStyle/>
-          <a:p>
-            <a:pPr indent="0" marL="0">
-              <a:buNone/>
-            </a:pPr>
-            <a:r>
-              <a:rPr lang="en-US" sz="1150" dirty="0">
-                <a:solidFill>
-                  <a:srgbClr val="66695F"/>
-                </a:solidFill>
-                <a:latin typeface="Malgun Gothic" pitchFamily="34" charset="0"/>
-                <a:ea typeface="Malgun Gothic" pitchFamily="34" charset="-122"/>
-                <a:cs typeface="Malgun Gothic" pitchFamily="34" charset="-120"/>
-              </a:rPr>
-              <a:t>예비 보안 키로 통과</a:t>
-            </a:r>
-            <a:endParaRPr lang="en-US" sz="1150" dirty="0"/>
-          </a:p>
-        </p:txBody>
-      </p:sp>
-      <p:sp>
-        <p:nvSpPr>
-          <p:cNvPr id="15" name="Text 10"/>
-          <p:cNvSpPr txBox="1"/>
-          <p:nvPr/>
-        </p:nvSpPr>
-        <p:spPr>
-          <a:xfrm>
-            <a:off x="713232" y="5532120"/>
-            <a:ext cx="10789920" cy="365760"/>
-          </a:xfrm>
-          <a:prstGeom prst="rect">
-            <a:avLst/>
-          </a:prstGeom>
-          <a:noFill/>
-          <a:ln/>
-        </p:spPr>
-        <p:txBody>
-          <a:bodyPr wrap="square" lIns="0" tIns="0" rIns="0" bIns="0" rtlCol="0" anchor="ctr"/>
-          <a:lstStyle/>
-          <a:p>
-            <a:pPr indent="0" marL="0">
-              <a:buNone/>
-            </a:pPr>
-            <a:r>
-              <a:rPr lang="en-US" sz="1200" dirty="0">
-                <a:solidFill>
-                  <a:srgbClr val="171914"/>
-                </a:solidFill>
-                <a:latin typeface="Malgun Gothic" pitchFamily="34" charset="0"/>
-                <a:ea typeface="Malgun Gothic" pitchFamily="34" charset="-122"/>
-                <a:cs typeface="Malgun Gothic" pitchFamily="34" charset="-120"/>
-              </a:rPr>
-              <a:t>지운 패스키로는 더 이상 들어갈 수 없습니다. 남은 하나로는 그대로 들어갑니다.</a:t>
-            </a:r>
-            <a:endParaRPr lang="en-US" sz="1200" dirty="0"/>
-          </a:p>
-        </p:txBody>
-      </p:sp>
-      <p:sp>
-        <p:nvSpPr>
-          <p:cNvPr id="16" name="Text 11"/>
+            <a:off x="5577840" y="4709160"/>
+            <a:ext cx="5699455" cy="1097280"/>
+          </a:xfrm>
+          <a:prstGeom prst="rect">
+            <a:avLst/>
+          </a:prstGeom>
+          <a:noFill/>
+          <a:ln/>
+        </p:spPr>
+        <p:txBody>
+          <a:bodyPr wrap="square" lIns="0" tIns="0" rIns="0" bIns="0" rtlCol="0" anchor="ctr"/>
+          <a:lstStyle/>
+          <a:p>
+            <a:pPr indent="0" marL="0">
+              <a:lnSpc>
+                <a:spcPts val="1600"/>
+              </a:lnSpc>
+              <a:buNone/>
+            </a:pPr>
+            <a:r>
+              <a:rPr lang="en-US" sz="1100" dirty="0">
+                <a:solidFill>
+                  <a:srgbClr val="D7DDD5"/>
+                </a:solidFill>
+                <a:latin typeface="Malgun Gothic" pitchFamily="34" charset="0"/>
+                <a:ea typeface="Malgun Gothic" pitchFamily="34" charset="-122"/>
+                <a:cs typeface="Malgun Gothic" pitchFamily="34" charset="-120"/>
+              </a:rPr>
+              <a:t>심사하는 사람이 기기 설정을 열지 않아도 웹 화면만으로 저장 위치를 알 수 있고, 그 진술이 운영체제의 자격증명 목록과 어긋나지 않는다는 것이 이 두 장으로 확인됩니다.</a:t>
+            </a:r>
+            <a:endParaRPr lang="en-US" sz="1100" dirty="0"/>
+          </a:p>
+        </p:txBody>
+      </p:sp>
+      <p:sp>
+        <p:nvSpPr>
+          <p:cNvPr id="12" name="Text 8"/>
+          <p:cNvSpPr txBox="1"/>
+          <p:nvPr/>
+        </p:nvSpPr>
+        <p:spPr>
+          <a:xfrm>
+            <a:off x="5349240" y="6035040"/>
+            <a:ext cx="6156655" cy="548640"/>
+          </a:xfrm>
+          <a:prstGeom prst="rect">
+            <a:avLst/>
+          </a:prstGeom>
+          <a:noFill/>
+          <a:ln/>
+        </p:spPr>
+        <p:txBody>
+          <a:bodyPr wrap="square" lIns="0" tIns="0" rIns="0" bIns="0" rtlCol="0" anchor="ctr"/>
+          <a:lstStyle/>
+          <a:p>
+            <a:pPr indent="0" marL="0">
+              <a:lnSpc>
+                <a:spcPts val="1400"/>
+              </a:lnSpc>
+              <a:buNone/>
+            </a:pPr>
+            <a:r>
+              <a:rPr lang="en-US" sz="1000" i="1" dirty="0">
+                <a:solidFill>
+                  <a:srgbClr val="3A443B"/>
+                </a:solidFill>
+                <a:latin typeface="Malgun Gothic" pitchFamily="34" charset="0"/>
+                <a:ea typeface="Malgun Gothic" pitchFamily="34" charset="-122"/>
+                <a:cs typeface="Malgun Gothic" pitchFamily="34" charset="-120"/>
+              </a:rPr>
+              <a:t>계정명이 synthetic- 으로 시작합니다. 실명이 들어가지 않았다는 사실이 기기 화면으로도 확인됩니다.</a:t>
+            </a:r>
+            <a:endParaRPr lang="en-US" sz="1000" dirty="0"/>
+          </a:p>
+        </p:txBody>
+      </p:sp>
+      <p:sp>
+        <p:nvSpPr>
+          <p:cNvPr id="13" name="Text 9"/>
           <p:cNvSpPr txBox="1"/>
           <p:nvPr/>
         </p:nvSpPr>
@@ -11231,13 +11820,13 @@
             <a:r>
               <a:rPr lang="en-US" sz="950" dirty="0">
                 <a:solidFill>
-                  <a:srgbClr val="66695F"/>
+                  <a:srgbClr val="3A443B"/>
                 </a:solidFill>
                 <a:latin typeface="Consolas" pitchFamily="34" charset="0"/>
                 <a:ea typeface="Consolas" pitchFamily="34" charset="-122"/>
                 <a:cs typeface="Consolas" pitchFamily="34" charset="-120"/>
               </a:rPr>
-              <a:t>로컬 인스턴스 · 가상 인증기로 실제 등록·삭제·로그인을 수행한 화면</a:t>
+              <a:t>실물 안드로이드 기기 · 크롬 · 2026-09-11 · 상단 알림줄과 하단 내비게이션 바는 잘라냈습니다</a:t>
             </a:r>
             <a:endParaRPr lang="en-US" sz="950" dirty="0"/>
           </a:p>
